--- a/make_presentation/templates/templates/premium/no_logo_5.pptx
+++ b/make_presentation/templates/templates/premium/no_logo_5.pptx
@@ -114,7 +114,13 @@
               <a:rPr b="0" lang="en-US" sz="2000" spc="-1" strike="noStrike">
                 <a:latin typeface="Arial"/>
               </a:rPr>
-              <a:t>Click to edit the notes format</a:t>
+              <a:t>Click to edit the notes </a:t>
+            </a:r>
+            <a:r>
+              <a:rPr b="0" lang="en-US" sz="2000" spc="-1" strike="noStrike">
+                <a:latin typeface="Arial"/>
+              </a:rPr>
+              <a:t>format</a:t>
             </a:r>
             <a:endParaRPr b="0" lang="en-US" sz="2000" spc="-1" strike="noStrike">
               <a:latin typeface="Arial"/>
@@ -299,7 +305,7 @@
             <a:pPr algn="r">
               <a:buNone/>
             </a:pPr>
-            <a:fld id="{416A7471-AD27-47A7-8451-03E5B3495066}" type="slidenum">
+            <a:fld id="{A4D966F6-704F-4250-BDD5-CF98230A4A03}" type="slidenum">
               <a:rPr b="0" lang="en-US" sz="1400" spc="-1" strike="noStrike">
                 <a:latin typeface="Times New Roman"/>
               </a:rPr>
@@ -440,7 +446,7 @@
               </a:lnSpc>
               <a:buNone/>
             </a:pPr>
-            <a:fld id="{3283542D-A97C-40F6-BBEF-0B46FF162BA2}" type="slidenum">
+            <a:fld id="{BAA52A07-7812-4083-981D-7636321D3D0A}" type="slidenum">
               <a:rPr b="0" lang="en-US" sz="1800" spc="-1" strike="noStrike">
                 <a:solidFill>
                   <a:srgbClr val="000000"/>
@@ -584,7 +590,7 @@
               </a:lnSpc>
               <a:buNone/>
             </a:pPr>
-            <a:fld id="{1953610A-9709-406D-B35C-DF1145D4A5A9}" type="slidenum">
+            <a:fld id="{07C940AB-24D3-4BDD-BED7-66C0C6CB3444}" type="slidenum">
               <a:rPr b="0" lang="en-US" sz="1800" spc="-1" strike="noStrike">
                 <a:solidFill>
                   <a:srgbClr val="000000"/>
@@ -728,7 +734,7 @@
               </a:lnSpc>
               <a:buNone/>
             </a:pPr>
-            <a:fld id="{234B89BB-DC7E-4FF8-91A0-407AD7F7066C}" type="slidenum">
+            <a:fld id="{075EDE6E-390B-49D0-8150-418C6C07F019}" type="slidenum">
               <a:rPr b="0" lang="en-US" sz="1800" spc="-1" strike="noStrike">
                 <a:solidFill>
                   <a:srgbClr val="000000"/>
@@ -872,7 +878,7 @@
               </a:lnSpc>
               <a:buNone/>
             </a:pPr>
-            <a:fld id="{A0DEEB94-4C46-4818-A7C7-2641648BCEC1}" type="slidenum">
+            <a:fld id="{74A6562A-9DBC-43E2-9880-C620051C3EB4}" type="slidenum">
               <a:rPr b="0" lang="en-US" sz="1800" spc="-1" strike="noStrike">
                 <a:solidFill>
                   <a:srgbClr val="000000"/>
@@ -1016,7 +1022,7 @@
               </a:lnSpc>
               <a:buNone/>
             </a:pPr>
-            <a:fld id="{C4633386-0FCE-439F-A694-4177A4A7BB34}" type="slidenum">
+            <a:fld id="{A2801CA5-C27E-4946-9ED1-488818863D98}" type="slidenum">
               <a:rPr b="0" lang="en-US" sz="1800" spc="-1" strike="noStrike">
                 <a:solidFill>
                   <a:srgbClr val="000000"/>
@@ -3059,7 +3065,7 @@
         <p:spPr>
           <a:xfrm>
             <a:off x="457200" y="4027680"/>
-            <a:ext cx="10287000" cy="2030760"/>
+            <a:ext cx="10928880" cy="2030760"/>
           </a:xfrm>
           <a:prstGeom prst="rect">
             <a:avLst/>
@@ -3090,7 +3096,7 @@
               </a:tabLst>
             </a:pPr>
             <a:r>
-              <a:rPr b="1" lang="en-US" sz="4000" spc="-1" strike="noStrike">
+              <a:rPr b="1" lang="en-US" sz="4800" spc="-1" strike="noStrike">
                 <a:solidFill>
                   <a:srgbClr val="ffffff"/>
                 </a:solidFill>
@@ -3099,7 +3105,7 @@
               </a:rPr>
               <a:t>TITLE</a:t>
             </a:r>
-            <a:endParaRPr b="0" lang="en-US" sz="4000" spc="-1" strike="noStrike">
+            <a:endParaRPr b="0" lang="en-US" sz="4800" spc="-1" strike="noStrike">
               <a:latin typeface="Arial"/>
             </a:endParaRPr>
           </a:p>
